--- a/slides/mini1p_SBI553_FINAL_2026-09-03_v2.pptx
+++ b/slides/mini1p_SBI553_FINAL_2026-09-03_v2.pptx
@@ -3102,8 +3102,8 @@
         </p:nvSpPr>
         <p:spPr>
           <a:xfrm>
-            <a:off x="822960" y="1828800"/>
-            <a:ext cx="10515600" cy="1280160"/>
+            <a:off x="822960" y="1371600"/>
+            <a:ext cx="10515600" cy="1097280"/>
           </a:xfrm>
           <a:prstGeom prst="rect">
             <a:avLst/>
@@ -3122,7 +3122,7 @@
               </a:spcAft>
             </a:pPr>
             <a:r>
-              <a:rPr sz="4000" b="1">
+              <a:rPr sz="3800" b="1">
                 <a:solidFill>
                   <a:srgbClr val="1F2937"/>
                 </a:solidFill>
@@ -3141,8 +3141,8 @@
         </p:nvSpPr>
         <p:spPr>
           <a:xfrm>
-            <a:off x="822960" y="3108960"/>
-            <a:ext cx="10515600" cy="1463040"/>
+            <a:off x="822960" y="2468880"/>
+            <a:ext cx="10515600" cy="1371600"/>
           </a:xfrm>
           <a:prstGeom prst="rect">
             <a:avLst/>
@@ -3161,15 +3161,38 @@
               </a:spcAft>
             </a:pPr>
             <a:r>
-              <a:rPr sz="2000" b="0">
-                <a:solidFill>
-                  <a:srgbClr val="1C6E8C"/>
+              <a:rPr sz="2600" b="1">
+                <a:solidFill>
+                  <a:srgbClr val="C0483B"/>
                 </a:solidFill>
                 <a:latin typeface="Calibri"/>
               </a:rPr>
-              <a:t>Day 1 no drug vs Day 2 SBI-553, same six mice, dosed 10 min before the assay</a:t>
-            </a:r>
-          </a:p>
+              <a:t>A general reduction in behaviour, not selective analgesia</a:t>
+            </a:r>
+          </a:p>
+        </p:txBody>
+      </p:sp>
+      <p:sp>
+        <p:nvSpPr>
+          <p:cNvPr id="4" name="TextBox 3"/>
+          <p:cNvSpPr txBox="1"/>
+          <p:nvPr/>
+        </p:nvSpPr>
+        <p:spPr>
+          <a:xfrm>
+            <a:off x="822960" y="3657600"/>
+            <a:ext cx="10515600" cy="1645920"/>
+          </a:xfrm>
+          <a:prstGeom prst="rect">
+            <a:avLst/>
+          </a:prstGeom>
+          <a:noFill/>
+        </p:spPr>
+        <p:txBody>
+          <a:bodyPr wrap="square">
+            <a:spAutoFit/>
+          </a:bodyPr>
+          <a:lstStyle/>
           <a:p>
             <a:pPr algn="l">
               <a:spcAft>
@@ -3183,32 +3206,9 @@
                 </a:solidFill>
                 <a:latin typeface="Calibri"/>
               </a:rPr>
-              <a:t>Five figures. Every number recomputed from the scoring files and cross-checked.</a:t>
-            </a:r>
-          </a:p>
-        </p:txBody>
-      </p:sp>
-      <p:sp>
-        <p:nvSpPr>
-          <p:cNvPr id="4" name="TextBox 3"/>
-          <p:cNvSpPr txBox="1"/>
-          <p:nvPr/>
-        </p:nvSpPr>
-        <p:spPr>
-          <a:xfrm>
-            <a:off x="822960" y="5029200"/>
-            <a:ext cx="10515600" cy="1280160"/>
-          </a:xfrm>
-          <a:prstGeom prst="rect">
-            <a:avLst/>
-          </a:prstGeom>
-          <a:noFill/>
-        </p:spPr>
-        <p:txBody>
-          <a:bodyPr wrap="square">
-            <a:spAutoFit/>
-          </a:bodyPr>
-          <a:lstStyle/>
+              <a:t>Escape / rearing is exploration, not pain — and it was the ONLY behaviour significantly</a:t>
+            </a:r>
+          </a:p>
           <a:p>
             <a:pPr algn="l">
               <a:spcAft>
@@ -3216,13 +3216,13 @@
               </a:spcAft>
             </a:pPr>
             <a:r>
-              <a:rPr sz="1600" b="0">
-                <a:solidFill>
-                  <a:srgbClr val="6B7280"/>
+              <a:rPr sz="2000" b="0">
+                <a:solidFill>
+                  <a:srgbClr val="1C6E8C"/>
                 </a:solidFill>
                 <a:latin typeface="Calibri"/>
               </a:rPr>
-              <a:t>change index  =  (total events ÷ total stimuli) on Day 2   ÷   the same on Day 1</a:t>
+              <a:t>reduced in all six mice. The reflexes fell least. A selective analgesic predicts the</a:t>
             </a:r>
           </a:p>
           <a:p>
@@ -3232,13 +3232,13 @@
               </a:spcAft>
             </a:pPr>
             <a:r>
-              <a:rPr sz="1600" b="0">
-                <a:solidFill>
-                  <a:srgbClr val="6B7280"/>
+              <a:rPr sz="2000" b="0">
+                <a:solidFill>
+                  <a:srgbClr val="1C6E8C"/>
                 </a:solidFill>
                 <a:latin typeface="Calibri"/>
               </a:rPr>
-              <a:t>All six mice received SBI-553. There was no vehicle group.</a:t>
+              <a:t>opposite ordering.</a:t>
             </a:r>
           </a:p>
         </p:txBody>
@@ -3251,8 +3251,8 @@
         </p:nvSpPr>
         <p:spPr>
           <a:xfrm>
-            <a:off x="822960" y="6309360"/>
-            <a:ext cx="10515600" cy="457200"/>
+            <a:off x="822960" y="5394960"/>
+            <a:ext cx="10515600" cy="1005840"/>
           </a:xfrm>
           <a:prstGeom prst="rect">
             <a:avLst/>
@@ -3271,13 +3271,68 @@
               </a:spcAft>
             </a:pPr>
             <a:r>
-              <a:rPr sz="1300" b="0">
+              <a:rPr sz="1500" b="0">
                 <a:solidFill>
                   <a:srgbClr val="6B7280"/>
                 </a:solidFill>
                 <a:latin typeface="Calibri"/>
               </a:rPr>
-              <a:t>Hansol Lim   ·   2026-09-03</a:t>
+              <a:t>Day 1 no drug vs Day 2 SBI-553, same six mice, dosed 10 min before the assay.  No vehicle group.</a:t>
+            </a:r>
+          </a:p>
+          <a:p>
+            <a:pPr algn="l">
+              <a:spcAft>
+                <a:spcPts val="600"/>
+              </a:spcAft>
+            </a:pPr>
+            <a:r>
+              <a:rPr sz="1500" b="0">
+                <a:solidFill>
+                  <a:srgbClr val="6B7280"/>
+                </a:solidFill>
+                <a:latin typeface="Calibri"/>
+              </a:rPr>
+              <a:t>change index  =  (total events ÷ total stimuli) on Day 2   ÷   the same on Day 1</a:t>
+            </a:r>
+          </a:p>
+        </p:txBody>
+      </p:sp>
+      <p:sp>
+        <p:nvSpPr>
+          <p:cNvPr id="6" name="TextBox 5"/>
+          <p:cNvSpPr txBox="1"/>
+          <p:nvPr/>
+        </p:nvSpPr>
+        <p:spPr>
+          <a:xfrm>
+            <a:off x="822960" y="6400800"/>
+            <a:ext cx="10515600" cy="411480"/>
+          </a:xfrm>
+          <a:prstGeom prst="rect">
+            <a:avLst/>
+          </a:prstGeom>
+          <a:noFill/>
+        </p:spPr>
+        <p:txBody>
+          <a:bodyPr wrap="square">
+            <a:spAutoFit/>
+          </a:bodyPr>
+          <a:lstStyle/>
+          <a:p>
+            <a:pPr algn="l">
+              <a:spcAft>
+                <a:spcPts val="600"/>
+              </a:spcAft>
+            </a:pPr>
+            <a:r>
+              <a:rPr sz="1200" b="0">
+                <a:solidFill>
+                  <a:srgbClr val="6B7280"/>
+                </a:solidFill>
+                <a:latin typeface="Calibri"/>
+              </a:rPr>
+              <a:t>Hansol Lim   ·   2026-09-03   ·   every number recomputed from the scoring files and cross-checked</a:t>
             </a:r>
           </a:p>
         </p:txBody>
@@ -3827,7 +3882,7 @@
                 </a:solidFill>
                 <a:latin typeface="Calibri"/>
               </a:rPr>
-              <a:t>Each animal tested on its own: escape/rearing falls in all six mice, 5 of 6 after correction</a:t>
+              <a:t>Escape/rearing — the behaviour that is NOT pain — is the only one significant in all six mice</a:t>
             </a:r>
           </a:p>
         </p:txBody>
@@ -3929,7 +3984,7 @@
                 </a:solidFill>
                 <a:latin typeface="Calibri"/>
               </a:rPr>
-              <a:t>Worked example, M2 escape: 60 events / 83 stimuli on Day 1 versus 13 / 70 on Day 2, index 0.26. If the rates were equal, 33 of the 73 events would be expected on Day 2; 13 were seen, p = 7.7×10⁻⁷. Escape/rearing: 6/6 significant uncorrected, 5/6 after FDR (M3 p = 0.032 becomes q = 0.082).</a:t>
+              <a:t>Decreased in / significantly decreased in:  escape 6/6 and 6/6  ·  withdrawal 6/6 and 5  ·  lick-bite 6/6 and 4  ·  attending 6/6 and 3  ·  guarding 5/6 and 3  ·  flinch 3/6 and 3 (the other three went UP). Guarding has one animal moving the other way: F1 rose nine-fold (2/87 → 12/58, p = 0.0006), so four significant does not mean four decreased.</a:t>
             </a:r>
           </a:p>
         </p:txBody>

--- a/slides/mini1p_SBI553_FINAL_2026-09-03_v2.pptx
+++ b/slides/mini1p_SBI553_FINAL_2026-09-03_v2.pptx
@@ -3389,7 +3389,7 @@
                 </a:solidFill>
                 <a:latin typeface="Calibri"/>
               </a:rPr>
-              <a:t>Every behaviour fell — including escape/rearing, which is not a pain measure</a:t>
+              <a:t>Everything fell, including the behaviour that is not pain</a:t>
             </a:r>
           </a:p>
         </p:txBody>
@@ -3428,7 +3428,7 @@
                 </a:solidFill>
                 <a:latin typeface="Calibri"/>
               </a:rPr>
-              <a:t>METHOD   Change index per behaviour, one dot per mouse, bar = MEDIAN of the six per-mouse indices. Every event in the stimulus block counted, each mouse divided by its own stimulus count. Log axis. Paired Wilcoxon over the six mice (exact, n = 6, smallest possible p = 0.031).</a:t>
+              <a:t>METHOD   Change index per behaviour, one dot per mouse, bar = MEDIAN of the six per-mouse indices. Counts every event in the WHOLE SESSION (baseline and rest included), divided by that mouse's total stimulus count. Log axis. Paired Wilcoxon over the six mice (exact, n = 6, smallest possible p = 0.031).</a:t>
             </a:r>
           </a:p>
         </p:txBody>
@@ -3564,7 +3564,7 @@
                 </a:solidFill>
                 <a:latin typeface="Calibri"/>
               </a:rPr>
-              <a:t>Lower on the drug day for all six behaviours, and flatter for the affective ones</a:t>
+              <a:t>Lower on the drug day, in every behaviour</a:t>
             </a:r>
           </a:p>
         </p:txBody>
@@ -3723,7 +3723,7 @@
                 </a:solidFill>
                 <a:latin typeface="Calibri"/>
               </a:rPr>
-              <a:t>Paired mouse by mouse: paw withdrawal and escape/rearing move in every animal</a:t>
+              <a:t>Escape/rearing falls at every stimulus, in every mouse</a:t>
             </a:r>
           </a:p>
         </p:txBody>
@@ -3882,7 +3882,7 @@
                 </a:solidFill>
                 <a:latin typeface="Calibri"/>
               </a:rPr>
-              <a:t>Escape/rearing — the behaviour that is NOT pain — is the only one significant in all six mice</a:t>
+              <a:t>Only escape/rearing changed in all six mice</a:t>
             </a:r>
           </a:p>
         </p:txBody>
@@ -3921,7 +3921,7 @@
                 </a:solidFill>
                 <a:latin typeface="Calibri"/>
               </a:rPr>
-              <a:t>METHOD   Change index per mouse, dot = the index, line = 95 % CI from the Poisson variance of the totals. EXACT POISSON RATE TEST on that animal's own counts: conditional on the n₁+n₂ events in total, the number landing on Day 2 is Binomial(n₁+n₂, t₂/(t₁+t₂)) if the two rates are equal; the two-sided binomial p is exact. Stars are uncorrected — 25 of 36 tests reach p&lt;0.05, 22 survive Benjamini-Hochberg.</a:t>
+              <a:t>METHOD   Change index per mouse, dot = the index, line = 95 % CI from the Poisson variance of the totals. Counts events inside the four STIMULUS BLOCKS only — so these indices are slightly lower than slide 1, which also counts baseline and rest. EXACT POISSON RATE TEST on that animal's own counts: conditional on the n₁+n₂ events in total, the number landing on Day 2 is Binomial(n₁+n₂, t₂/(t₁+t₂)) if the two rates are equal. Stars are uncorrected — 25 of 36 tests reach p&lt;0.05, 22 survive Benjamini-Hochberg.</a:t>
             </a:r>
           </a:p>
         </p:txBody>
@@ -3984,7 +3984,7 @@
                 </a:solidFill>
                 <a:latin typeface="Calibri"/>
               </a:rPr>
-              <a:t>Decreased in / significantly decreased in:  escape 6/6 and 6/6  ·  withdrawal 6/6 and 5  ·  lick-bite 6/6 and 4  ·  attending 6/6 and 3  ·  guarding 5/6 and 3  ·  flinch 3/6 and 3 (the other three went UP). Guarding has one animal moving the other way: F1 rose nine-fold (2/87 → 12/58, p = 0.0006), so four significant does not mean four decreased.</a:t>
+              <a:t>Each animal received 57–100 stimuli, which is what makes a single-animal test possible. Decreased in / significantly decreased in:  escape 6/6 and 6/6  ·  withdrawal 6/6 and 5  ·  lick-bite 6/6 and 4  ·  attending 6/6 and 3  ·  guarding 5/6 and 3  ·  flinch 3/6 and 3 (the other three went UP). Guarding has one animal moving the other way: F1 rose nine-fold (2/87 → 12/58, p = 0.0006), so four significant does not mean four decreased.</a:t>
             </a:r>
           </a:p>
         </p:txBody>
@@ -4041,7 +4041,7 @@
                 </a:solidFill>
                 <a:latin typeface="Calibri"/>
               </a:rPr>
-              <a:t>The affective/reflexive dissociation a biased agonist predicts is not what happened</a:t>
+              <a:t>Affective and reflexive pain fell together</a:t>
             </a:r>
           </a:p>
         </p:txBody>
